--- a/decks/architect-universal-data-graph-1-udg-overview/source/deck.pptx
+++ b/decks/architect-universal-data-graph-1-udg-overview/source/deck.pptx
@@ -13027,7 +13027,7 @@
                 <a:cs typeface="Courier New"/>
                 <a:sym typeface="Courier New"/>
               </a:rPr>
-              <a:t>        "name": "John Doe",</a:t>
+              <a:t>        "name": "User 1",</a:t>
             </a:r>
             <a:endParaRPr sz="1200">
               <a:solidFill>
@@ -13377,7 +13377,7 @@
                 <a:cs typeface="Courier New"/>
                 <a:sym typeface="Courier New"/>
               </a:rPr>
-              <a:t>        "name": "Jane Doe",</a:t>
+              <a:t>        "name": "User 2",</a:t>
             </a:r>
             <a:endParaRPr sz="1200">
               <a:solidFill>
